--- a/Lectures/AutenticEncryptionLite.pptx
+++ b/Lectures/AutenticEncryptionLite.pptx
@@ -282,7 +282,7 @@
           <a:p>
             <a:fld id="{CBA08D16-15DC-4E25-BDC3-F25146157B16}" type="datetimeFigureOut">
               <a:rPr lang="ru-RU" smtClean="0"/>
-              <a:t>16.04.2025</a:t>
+              <a:t>22.05.2026</a:t>
             </a:fld>
             <a:endParaRPr lang="ru-RU"/>
           </a:p>
@@ -771,7 +771,7 @@
           <a:p>
             <a:fld id="{FCEC8293-DB51-454A-BE81-EC8FCB31EBA2}" type="datetime1">
               <a:rPr lang="ru-RU" smtClean="0"/>
-              <a:t>16.04.2025</a:t>
+              <a:t>22.05.2026</a:t>
             </a:fld>
             <a:endParaRPr lang="ru-RU"/>
           </a:p>
@@ -942,7 +942,7 @@
           <a:p>
             <a:fld id="{241C87B1-1C35-4DBD-BC18-2BC72E776603}" type="datetime1">
               <a:rPr lang="ru-RU" smtClean="0"/>
-              <a:t>16.04.2025</a:t>
+              <a:t>22.05.2026</a:t>
             </a:fld>
             <a:endParaRPr lang="ru-RU"/>
           </a:p>
@@ -1123,7 +1123,7 @@
           <a:p>
             <a:fld id="{3134C275-26C0-42CD-9111-9ADE65922AF9}" type="datetime1">
               <a:rPr lang="ru-RU" smtClean="0"/>
-              <a:t>16.04.2025</a:t>
+              <a:t>22.05.2026</a:t>
             </a:fld>
             <a:endParaRPr lang="ru-RU"/>
           </a:p>
@@ -1294,7 +1294,7 @@
           <a:p>
             <a:fld id="{C1A9A50B-C350-45F5-8AAB-ADB9E670AF2E}" type="datetime1">
               <a:rPr lang="ru-RU" smtClean="0"/>
-              <a:t>16.04.2025</a:t>
+              <a:t>22.05.2026</a:t>
             </a:fld>
             <a:endParaRPr lang="ru-RU"/>
           </a:p>
@@ -1542,7 +1542,7 @@
           <a:p>
             <a:fld id="{089688C9-348F-42F9-B6C0-5990DDE0C5B2}" type="datetime1">
               <a:rPr lang="ru-RU" smtClean="0"/>
-              <a:t>16.04.2025</a:t>
+              <a:t>22.05.2026</a:t>
             </a:fld>
             <a:endParaRPr lang="ru-RU"/>
           </a:p>
@@ -1774,7 +1774,7 @@
           <a:p>
             <a:fld id="{684AFD8F-6DD9-4AD3-A505-FDC3F5C5F3F6}" type="datetime1">
               <a:rPr lang="ru-RU" smtClean="0"/>
-              <a:t>16.04.2025</a:t>
+              <a:t>22.05.2026</a:t>
             </a:fld>
             <a:endParaRPr lang="ru-RU"/>
           </a:p>
@@ -2141,7 +2141,7 @@
           <a:p>
             <a:fld id="{63551EFE-4D02-45EB-A747-8B6F047B5AA0}" type="datetime1">
               <a:rPr lang="ru-RU" smtClean="0"/>
-              <a:t>16.04.2025</a:t>
+              <a:t>22.05.2026</a:t>
             </a:fld>
             <a:endParaRPr lang="ru-RU"/>
           </a:p>
@@ -2261,7 +2261,7 @@
           <a:p>
             <a:fld id="{813A9F34-E5CD-4B8F-AA9E-889C84372B20}" type="datetime1">
               <a:rPr lang="ru-RU" smtClean="0"/>
-              <a:t>16.04.2025</a:t>
+              <a:t>22.05.2026</a:t>
             </a:fld>
             <a:endParaRPr lang="ru-RU"/>
           </a:p>
@@ -2359,7 +2359,7 @@
           <a:p>
             <a:fld id="{51224D22-9B29-44A6-8E82-95FC492DEDC1}" type="datetime1">
               <a:rPr lang="ru-RU" smtClean="0"/>
-              <a:t>16.04.2025</a:t>
+              <a:t>22.05.2026</a:t>
             </a:fld>
             <a:endParaRPr lang="ru-RU"/>
           </a:p>
@@ -2637,7 +2637,7 @@
           <a:p>
             <a:fld id="{91D1034F-4441-48A1-BDC0-25EA1022324A}" type="datetime1">
               <a:rPr lang="ru-RU" smtClean="0"/>
-              <a:t>16.04.2025</a:t>
+              <a:t>22.05.2026</a:t>
             </a:fld>
             <a:endParaRPr lang="ru-RU"/>
           </a:p>
@@ -2892,7 +2892,7 @@
           <a:p>
             <a:fld id="{B0FFDE79-B627-473B-AE17-4C65BD2495F7}" type="datetime1">
               <a:rPr lang="ru-RU" smtClean="0"/>
-              <a:t>16.04.2025</a:t>
+              <a:t>22.05.2026</a:t>
             </a:fld>
             <a:endParaRPr lang="ru-RU"/>
           </a:p>
@@ -3106,7 +3106,7 @@
           <a:p>
             <a:fld id="{11CA537A-1B8C-47BA-9BA6-7CE3FAFDA8BE}" type="datetime1">
               <a:rPr lang="ru-RU" smtClean="0"/>
-              <a:t>16.04.2025</a:t>
+              <a:t>22.05.2026</a:t>
             </a:fld>
             <a:endParaRPr lang="ru-RU"/>
           </a:p>
@@ -3586,9 +3586,10 @@
               <a:t>202</a:t>
             </a:r>
             <a:r>
-              <a:rPr lang="ru-RU" dirty="0"/>
+              <a:rPr lang="ru-RU"/>
               <a:t>5</a:t>
             </a:r>
+            <a:endParaRPr lang="ru-RU" dirty="0"/>
           </a:p>
         </p:txBody>
       </p:sp>
